--- a/activity/M04A06/M04A06.pptx
+++ b/activity/M04A06/M04A06.pptx
@@ -146,6 +146,30 @@
 
 <file path=ppt/changesInfos/changesInfo1.xml><?xml version="1.0" encoding="utf-8"?>
 <pc:chgInfo xmlns:a="http://schemas.openxmlformats.org/drawingml/2006/main" xmlns:r="http://schemas.openxmlformats.org/officeDocument/2006/relationships" xmlns:ac="http://schemas.microsoft.com/office/drawing/2013/main/command" xmlns:pc="http://schemas.microsoft.com/office/powerpoint/2013/main/command">
+  <pc:docChgLst>
+    <pc:chgData name="WILLIAM RICARDO AGUILAR PIÑA" userId="25538c52-b196-49fc-9025-2dd86a54f18a" providerId="ADAL" clId="{DB3023CB-4887-4513-B78A-098C3A62B9C2}"/>
+    <pc:docChg chg="modSld">
+      <pc:chgData name="WILLIAM RICARDO AGUILAR PIÑA" userId="25538c52-b196-49fc-9025-2dd86a54f18a" providerId="ADAL" clId="{DB3023CB-4887-4513-B78A-098C3A62B9C2}" dt="2023-12-01T14:22:50.602" v="0" actId="20577"/>
+      <pc:docMkLst>
+        <pc:docMk/>
+      </pc:docMkLst>
+      <pc:sldChg chg="modSp mod">
+        <pc:chgData name="WILLIAM RICARDO AGUILAR PIÑA" userId="25538c52-b196-49fc-9025-2dd86a54f18a" providerId="ADAL" clId="{DB3023CB-4887-4513-B78A-098C3A62B9C2}" dt="2023-12-01T14:22:50.602" v="0" actId="20577"/>
+        <pc:sldMkLst>
+          <pc:docMk/>
+          <pc:sldMk cId="2171958353" sldId="339"/>
+        </pc:sldMkLst>
+        <pc:spChg chg="mod">
+          <ac:chgData name="WILLIAM RICARDO AGUILAR PIÑA" userId="25538c52-b196-49fc-9025-2dd86a54f18a" providerId="ADAL" clId="{DB3023CB-4887-4513-B78A-098C3A62B9C2}" dt="2023-12-01T14:22:50.602" v="0" actId="20577"/>
+          <ac:spMkLst>
+            <pc:docMk/>
+            <pc:sldMk cId="2171958353" sldId="339"/>
+            <ac:spMk id="8" creationId="{00000000-0000-0000-0000-000000000000}"/>
+          </ac:spMkLst>
+        </pc:spChg>
+      </pc:sldChg>
+    </pc:docChg>
+  </pc:docChgLst>
   <pc:docChgLst>
     <pc:chgData name="WILLIAM RICARDO AGUILAR PIÑA" userId="25538c52-b196-49fc-9025-2dd86a54f18a" providerId="ADAL" clId="{63D59B85-3E0F-46BB-BCE5-17E4A9AD5FF3}"/>
     <pc:docChg chg="custSel modSld">
@@ -296,30 +320,6 @@
       </pc:sldChg>
     </pc:docChg>
   </pc:docChgLst>
-  <pc:docChgLst>
-    <pc:chgData name="WILLIAM RICARDO AGUILAR PIÑA" userId="25538c52-b196-49fc-9025-2dd86a54f18a" providerId="ADAL" clId="{DB3023CB-4887-4513-B78A-098C3A62B9C2}"/>
-    <pc:docChg chg="modSld">
-      <pc:chgData name="WILLIAM RICARDO AGUILAR PIÑA" userId="25538c52-b196-49fc-9025-2dd86a54f18a" providerId="ADAL" clId="{DB3023CB-4887-4513-B78A-098C3A62B9C2}" dt="2023-12-01T14:22:50.602" v="0" actId="20577"/>
-      <pc:docMkLst>
-        <pc:docMk/>
-      </pc:docMkLst>
-      <pc:sldChg chg="modSp mod">
-        <pc:chgData name="WILLIAM RICARDO AGUILAR PIÑA" userId="25538c52-b196-49fc-9025-2dd86a54f18a" providerId="ADAL" clId="{DB3023CB-4887-4513-B78A-098C3A62B9C2}" dt="2023-12-01T14:22:50.602" v="0" actId="20577"/>
-        <pc:sldMkLst>
-          <pc:docMk/>
-          <pc:sldMk cId="2171958353" sldId="339"/>
-        </pc:sldMkLst>
-        <pc:spChg chg="mod">
-          <ac:chgData name="WILLIAM RICARDO AGUILAR PIÑA" userId="25538c52-b196-49fc-9025-2dd86a54f18a" providerId="ADAL" clId="{DB3023CB-4887-4513-B78A-098C3A62B9C2}" dt="2023-12-01T14:22:50.602" v="0" actId="20577"/>
-          <ac:spMkLst>
-            <pc:docMk/>
-            <pc:sldMk cId="2171958353" sldId="339"/>
-            <ac:spMk id="8" creationId="{00000000-0000-0000-0000-000000000000}"/>
-          </ac:spMkLst>
-        </pc:spChg>
-      </pc:sldChg>
-    </pc:docChg>
-  </pc:docChgLst>
 </pc:chgInfo>
 </file>
 
@@ -406,7 +406,7 @@
             <a:fld id="{53CE91DE-ABC6-4D22-89A0-1765B629FB43}" type="datetimeFigureOut">
               <a:rPr lang="es-CO" smtClean="0"/>
               <a:pPr/>
-              <a:t>01/12/2023</a:t>
+              <a:t>21/11/2025</a:t>
             </a:fld>
             <a:endParaRPr lang="es-CO"/>
           </a:p>
@@ -2304,7 +2304,7 @@
             <a:fld id="{43DF08CB-A55A-40B1-AEFD-F19B3CFD19B5}" type="datetimeFigureOut">
               <a:rPr lang="es-CO" smtClean="0"/>
               <a:pPr/>
-              <a:t>01/12/2023</a:t>
+              <a:t>21/11/2025</a:t>
             </a:fld>
             <a:endParaRPr lang="es-CO"/>
           </a:p>
@@ -2471,7 +2471,7 @@
             <a:fld id="{43DF08CB-A55A-40B1-AEFD-F19B3CFD19B5}" type="datetimeFigureOut">
               <a:rPr lang="es-CO" smtClean="0"/>
               <a:pPr/>
-              <a:t>01/12/2023</a:t>
+              <a:t>21/11/2025</a:t>
             </a:fld>
             <a:endParaRPr lang="es-CO"/>
           </a:p>
@@ -2648,7 +2648,7 @@
             <a:fld id="{43DF08CB-A55A-40B1-AEFD-F19B3CFD19B5}" type="datetimeFigureOut">
               <a:rPr lang="es-CO" smtClean="0"/>
               <a:pPr/>
-              <a:t>01/12/2023</a:t>
+              <a:t>21/11/2025</a:t>
             </a:fld>
             <a:endParaRPr lang="es-CO"/>
           </a:p>
@@ -2815,7 +2815,7 @@
             <a:fld id="{43DF08CB-A55A-40B1-AEFD-F19B3CFD19B5}" type="datetimeFigureOut">
               <a:rPr lang="es-CO" smtClean="0"/>
               <a:pPr/>
-              <a:t>01/12/2023</a:t>
+              <a:t>21/11/2025</a:t>
             </a:fld>
             <a:endParaRPr lang="es-CO"/>
           </a:p>
@@ -3058,7 +3058,7 @@
             <a:fld id="{43DF08CB-A55A-40B1-AEFD-F19B3CFD19B5}" type="datetimeFigureOut">
               <a:rPr lang="es-CO" smtClean="0"/>
               <a:pPr/>
-              <a:t>01/12/2023</a:t>
+              <a:t>21/11/2025</a:t>
             </a:fld>
             <a:endParaRPr lang="es-CO"/>
           </a:p>
@@ -3343,7 +3343,7 @@
             <a:fld id="{43DF08CB-A55A-40B1-AEFD-F19B3CFD19B5}" type="datetimeFigureOut">
               <a:rPr lang="es-CO" smtClean="0"/>
               <a:pPr/>
-              <a:t>01/12/2023</a:t>
+              <a:t>21/11/2025</a:t>
             </a:fld>
             <a:endParaRPr lang="es-CO"/>
           </a:p>
@@ -3762,7 +3762,7 @@
             <a:fld id="{43DF08CB-A55A-40B1-AEFD-F19B3CFD19B5}" type="datetimeFigureOut">
               <a:rPr lang="es-CO" smtClean="0"/>
               <a:pPr/>
-              <a:t>01/12/2023</a:t>
+              <a:t>21/11/2025</a:t>
             </a:fld>
             <a:endParaRPr lang="es-CO"/>
           </a:p>
@@ -3877,7 +3877,7 @@
             <a:fld id="{43DF08CB-A55A-40B1-AEFD-F19B3CFD19B5}" type="datetimeFigureOut">
               <a:rPr lang="es-CO" smtClean="0"/>
               <a:pPr/>
-              <a:t>01/12/2023</a:t>
+              <a:t>21/11/2025</a:t>
             </a:fld>
             <a:endParaRPr lang="es-CO"/>
           </a:p>
@@ -3969,7 +3969,7 @@
             <a:fld id="{43DF08CB-A55A-40B1-AEFD-F19B3CFD19B5}" type="datetimeFigureOut">
               <a:rPr lang="es-CO" smtClean="0"/>
               <a:pPr/>
-              <a:t>01/12/2023</a:t>
+              <a:t>21/11/2025</a:t>
             </a:fld>
             <a:endParaRPr lang="es-CO"/>
           </a:p>
@@ -4243,7 +4243,7 @@
             <a:fld id="{43DF08CB-A55A-40B1-AEFD-F19B3CFD19B5}" type="datetimeFigureOut">
               <a:rPr lang="es-CO" smtClean="0"/>
               <a:pPr/>
-              <a:t>01/12/2023</a:t>
+              <a:t>21/11/2025</a:t>
             </a:fld>
             <a:endParaRPr lang="es-CO"/>
           </a:p>
@@ -4493,7 +4493,7 @@
             <a:fld id="{43DF08CB-A55A-40B1-AEFD-F19B3CFD19B5}" type="datetimeFigureOut">
               <a:rPr lang="es-CO" smtClean="0"/>
               <a:pPr/>
-              <a:t>01/12/2023</a:t>
+              <a:t>21/11/2025</a:t>
             </a:fld>
             <a:endParaRPr lang="es-CO"/>
           </a:p>
@@ -4706,7 +4706,7 @@
             <a:fld id="{43DF08CB-A55A-40B1-AEFD-F19B3CFD19B5}" type="datetimeFigureOut">
               <a:rPr lang="es-CO" smtClean="0"/>
               <a:pPr/>
-              <a:t>01/12/2023</a:t>
+              <a:t>21/11/2025</a:t>
             </a:fld>
             <a:endParaRPr lang="es-CO"/>
           </a:p>
